--- a/docs/deck/precedent-deck.pptx
+++ b/docs/deck/precedent-deck.pptx
@@ -6738,7 +6738,7 @@
           <a:p>
             <a:pPr algn="l">
               <a:spcAft>
-                <a:spcPts val="1400"/>
+                <a:spcPts val="1200"/>
               </a:spcAft>
             </a:pPr>
             <a:r>
@@ -6754,7 +6754,7 @@
           <a:p>
             <a:pPr algn="l">
               <a:spcAft>
-                <a:spcPts val="1400"/>
+                <a:spcPts val="1200"/>
               </a:spcAft>
             </a:pPr>
             <a:r>
@@ -6770,7 +6770,7 @@
           <a:p>
             <a:pPr algn="l">
               <a:spcAft>
-                <a:spcPts val="1400"/>
+                <a:spcPts val="1200"/>
               </a:spcAft>
             </a:pPr>
             <a:r>
@@ -6786,17 +6786,33 @@
           <a:p>
             <a:pPr algn="l">
               <a:spcAft>
-                <a:spcPts val="1400"/>
+                <a:spcPts val="1200"/>
               </a:spcAft>
             </a:pPr>
             <a:r>
-              <a:rPr sz="1400" b="0">
+              <a:rPr sz="1300" b="0">
+                <a:solidFill>
+                  <a:srgbClr val="34D399"/>
+                </a:solidFill>
+                <a:latin typeface="Arial"/>
+              </a:rPr>
+              <a:t>Registered · active on Agentverse (Almanac-confirmed): Watcher agent1q2m0gk9…jcgkldx · Librarian agent1qv760pr2…kse9xv7 · Operator agent1qwesj8x7…uxna02g.</a:t>
+            </a:r>
+          </a:p>
+          <a:p>
+            <a:pPr algn="l">
+              <a:spcAft>
+                <a:spcPts val="1200"/>
+              </a:spcAft>
+            </a:pPr>
+            <a:r>
+              <a:rPr sz="1300" b="0">
                 <a:solidFill>
                   <a:srgbClr val="8A8F98"/>
                 </a:solidFill>
                 <a:latin typeface="Arial"/>
               </a:rPr>
-              <a:t>Agentverse profile URLs + the ASI:One shared-chat URL are captured at live registration.</a:t>
+              <a:t>Full profile URLs + the ASI:One shared-chat URL are listed in the submission (Fetch deliverables).</a:t>
             </a:r>
           </a:p>
         </p:txBody>

--- a/docs/deck/precedent-deck.pptx
+++ b/docs/deck/precedent-deck.pptx
@@ -4343,16 +4343,40 @@
           </a:p>
         </p:txBody>
       </p:sp>
-      <p:sp>
-        <p:nvSpPr>
-          <p:cNvPr id="3" name="TextBox 2"/>
+      <p:pic>
+        <p:nvPicPr>
+          <p:cNvPr id="3" name="Picture 2" descr="precedent-seal-dark.png"/>
+          <p:cNvPicPr>
+            <a:picLocks noChangeAspect="1"/>
+          </p:cNvPicPr>
+          <p:nvPr/>
+        </p:nvPicPr>
+        <p:blipFill>
+          <a:blip r:embed="rId2"/>
+          <a:stretch>
+            <a:fillRect/>
+          </a:stretch>
+        </p:blipFill>
+        <p:spPr>
+          <a:xfrm>
+            <a:off x="4813706" y="502920"/>
+            <a:ext cx="2564283" cy="2514600"/>
+          </a:xfrm>
+          <a:prstGeom prst="rect">
+            <a:avLst/>
+          </a:prstGeom>
+        </p:spPr>
+      </p:pic>
+      <p:sp>
+        <p:nvSpPr>
+          <p:cNvPr id="4" name="TextBox 3"/>
           <p:cNvSpPr txBox="1"/>
           <p:nvPr/>
         </p:nvSpPr>
         <p:spPr>
           <a:xfrm>
-            <a:off x="914400" y="2194560"/>
-            <a:ext cx="10332720" cy="2011680"/>
+            <a:off x="914400" y="3200400"/>
+            <a:ext cx="10332720" cy="1737360"/>
           </a:xfrm>
           <a:prstGeom prst="rect">
             <a:avLst/>
@@ -4367,7 +4391,7 @@
           <a:p>
             <a:pPr algn="ctr"/>
             <a:r>
-              <a:rPr sz="8000" b="1">
+              <a:rPr sz="6600" b="1">
                 <a:solidFill>
                   <a:srgbClr val="E6E6E6"/>
                 </a:solidFill>
@@ -4379,7 +4403,7 @@
           <a:p>
             <a:pPr algn="ctr"/>
             <a:r>
-              <a:rPr sz="2600" b="0">
+              <a:rPr sz="2400" b="0">
                 <a:solidFill>
                   <a:srgbClr val="34D399"/>
                 </a:solidFill>
@@ -4392,13 +4416,13 @@
       </p:sp>
       <p:sp>
         <p:nvSpPr>
-          <p:cNvPr id="4" name="TextBox 3"/>
+          <p:cNvPr id="5" name="TextBox 4"/>
           <p:cNvSpPr txBox="1"/>
           <p:nvPr/>
         </p:nvSpPr>
         <p:spPr>
           <a:xfrm>
-            <a:off x="914400" y="5669280"/>
+            <a:off x="914400" y="5989320"/>
             <a:ext cx="10332720" cy="548640"/>
           </a:xfrm>
           <a:prstGeom prst="rect">

--- a/docs/deck/precedent-deck.pptx
+++ b/docs/deck/precedent-deck.pptx
@@ -4343,30 +4343,53 @@
           </a:p>
         </p:txBody>
       </p:sp>
-      <p:pic>
-        <p:nvPicPr>
-          <p:cNvPr id="3" name="Picture 2" descr="precedent-seal-dark.png"/>
-          <p:cNvPicPr>
-            <a:picLocks noChangeAspect="1"/>
-          </p:cNvPicPr>
+      <p:sp>
+        <p:nvSpPr>
+          <p:cNvPr id="3" name="TextBox 2"/>
+          <p:cNvSpPr txBox="1"/>
           <p:nvPr/>
-        </p:nvPicPr>
-        <p:blipFill>
-          <a:blip r:embed="rId2"/>
-          <a:stretch>
-            <a:fillRect/>
-          </a:stretch>
-        </p:blipFill>
-        <p:spPr>
-          <a:xfrm>
-            <a:off x="4813706" y="502920"/>
-            <a:ext cx="2564283" cy="2514600"/>
+        </p:nvSpPr>
+        <p:spPr>
+          <a:xfrm>
+            <a:off x="914400" y="2194560"/>
+            <a:ext cx="10332720" cy="2011680"/>
           </a:xfrm>
           <a:prstGeom prst="rect">
             <a:avLst/>
           </a:prstGeom>
-        </p:spPr>
-      </p:pic>
+          <a:noFill/>
+        </p:spPr>
+        <p:txBody>
+          <a:bodyPr wrap="square" anchor="t">
+            <a:spAutoFit/>
+          </a:bodyPr>
+          <a:lstStyle/>
+          <a:p>
+            <a:pPr algn="ctr"/>
+            <a:r>
+              <a:rPr sz="8000" b="1">
+                <a:solidFill>
+                  <a:srgbClr val="E6E6E6"/>
+                </a:solidFill>
+                <a:latin typeface="Arial"/>
+              </a:rPr>
+              <a:t>Precedent</a:t>
+            </a:r>
+          </a:p>
+          <a:p>
+            <a:pPr algn="ctr"/>
+            <a:r>
+              <a:rPr sz="2600" b="0">
+                <a:solidFill>
+                  <a:srgbClr val="34D399"/>
+                </a:solidFill>
+                <a:latin typeface="Arial"/>
+              </a:rPr>
+              <a:t>Every incident resolved becomes precedent.</a:t>
+            </a:r>
+          </a:p>
+        </p:txBody>
+      </p:sp>
       <p:sp>
         <p:nvSpPr>
           <p:cNvPr id="4" name="TextBox 3"/>
@@ -4375,54 +4398,7 @@
         </p:nvSpPr>
         <p:spPr>
           <a:xfrm>
-            <a:off x="914400" y="3200400"/>
-            <a:ext cx="10332720" cy="1737360"/>
-          </a:xfrm>
-          <a:prstGeom prst="rect">
-            <a:avLst/>
-          </a:prstGeom>
-          <a:noFill/>
-        </p:spPr>
-        <p:txBody>
-          <a:bodyPr wrap="square" anchor="t">
-            <a:spAutoFit/>
-          </a:bodyPr>
-          <a:lstStyle/>
-          <a:p>
-            <a:pPr algn="ctr"/>
-            <a:r>
-              <a:rPr sz="6600" b="1">
-                <a:solidFill>
-                  <a:srgbClr val="E6E6E6"/>
-                </a:solidFill>
-                <a:latin typeface="Arial"/>
-              </a:rPr>
-              <a:t>Precedent</a:t>
-            </a:r>
-          </a:p>
-          <a:p>
-            <a:pPr algn="ctr"/>
-            <a:r>
-              <a:rPr sz="2400" b="0">
-                <a:solidFill>
-                  <a:srgbClr val="34D399"/>
-                </a:solidFill>
-                <a:latin typeface="Arial"/>
-              </a:rPr>
-              <a:t>Every incident resolved becomes precedent.</a:t>
-            </a:r>
-          </a:p>
-        </p:txBody>
-      </p:sp>
-      <p:sp>
-        <p:nvSpPr>
-          <p:cNvPr id="5" name="TextBox 4"/>
-          <p:cNvSpPr txBox="1"/>
-          <p:nvPr/>
-        </p:nvSpPr>
-        <p:spPr>
-          <a:xfrm>
-            <a:off x="914400" y="5989320"/>
+            <a:off x="914400" y="5669280"/>
             <a:ext cx="10332720" cy="548640"/>
           </a:xfrm>
           <a:prstGeom prst="rect">
